--- a/Woche_6_Projektstart/Woche_6_Projektstart_v01.pptx
+++ b/Woche_6_Projektstart/Woche_6_Projektstart_v01.pptx
@@ -7,6 +7,9 @@
   <p:notesMasterIdLst>
     <p:notesMasterId r:id="rId37"/>
   </p:notesMasterIdLst>
+  <p:handoutMasterIdLst>
+    <p:handoutMasterId r:id="rId38"/>
+  </p:handoutMasterIdLst>
   <p:sldIdLst>
     <p:sldId id="299" r:id="rId2"/>
     <p:sldId id="300" r:id="rId3"/>
@@ -175,8 +178,8 @@
 <pc:chgInfo xmlns:a="http://schemas.openxmlformats.org/drawingml/2006/main" xmlns:r="http://schemas.openxmlformats.org/officeDocument/2006/relationships" xmlns:ac="http://schemas.microsoft.com/office/drawing/2013/main/command" xmlns:pc="http://schemas.microsoft.com/office/powerpoint/2013/main/command">
   <pc:docChgLst>
     <pc:chgData name="Peter Bernhardt" userId="f2333933-0b12-4d6e-972f-f87625423892" providerId="ADAL" clId="{2C628E33-589C-449E-BBA5-ED05E3E5CC01}"/>
-    <pc:docChg chg="undo custSel addSld delSld modSld">
-      <pc:chgData name="Peter Bernhardt" userId="f2333933-0b12-4d6e-972f-f87625423892" providerId="ADAL" clId="{2C628E33-589C-449E-BBA5-ED05E3E5CC01}" dt="2026-04-21T11:21:56.956" v="1983" actId="20577"/>
+    <pc:docChg chg="undo custSel addSld delSld modSld modHandout">
+      <pc:chgData name="Peter Bernhardt" userId="f2333933-0b12-4d6e-972f-f87625423892" providerId="ADAL" clId="{2C628E33-589C-449E-BBA5-ED05E3E5CC01}" dt="2026-04-21T11:30:17.304" v="1984" actId="478"/>
       <pc:docMkLst>
         <pc:docMk/>
       </pc:docMkLst>
@@ -1261,6 +1264,154 @@
 </pc:chgInfo>
 </file>
 
+<file path=ppt/handoutMasters/handoutMaster1.xml><?xml version="1.0" encoding="utf-8"?>
+<p:handoutMaster xmlns:a="http://schemas.openxmlformats.org/drawingml/2006/main" xmlns:r="http://schemas.openxmlformats.org/officeDocument/2006/relationships" xmlns:p="http://schemas.openxmlformats.org/presentationml/2006/main">
+  <p:cSld>
+    <p:bg>
+      <p:bgRef idx="1001">
+        <a:schemeClr val="bg1"/>
+      </p:bgRef>
+    </p:bg>
+    <p:spTree>
+      <p:nvGrpSpPr>
+        <p:cNvPr id="1" name=""/>
+        <p:cNvGrpSpPr/>
+        <p:nvPr/>
+      </p:nvGrpSpPr>
+      <p:grpSpPr>
+        <a:xfrm>
+          <a:off x="0" y="0"/>
+          <a:ext cx="0" cy="0"/>
+          <a:chOff x="0" y="0"/>
+          <a:chExt cx="0" cy="0"/>
+        </a:xfrm>
+      </p:grpSpPr>
+      <p:sp>
+        <p:nvSpPr>
+          <p:cNvPr id="2" name="Kopfzeilenplatzhalter 1">
+            <a:extLst>
+              <a:ext uri="{FF2B5EF4-FFF2-40B4-BE49-F238E27FC236}">
+                <a16:creationId xmlns:a16="http://schemas.microsoft.com/office/drawing/2014/main" id="{10B434C2-CA52-51F0-C1F2-B635298BF8CC}"/>
+              </a:ext>
+            </a:extLst>
+          </p:cNvPr>
+          <p:cNvSpPr>
+            <a:spLocks noGrp="1"/>
+          </p:cNvSpPr>
+          <p:nvPr>
+            <p:ph type="hdr" sz="quarter"/>
+          </p:nvPr>
+        </p:nvSpPr>
+        <p:spPr>
+          <a:xfrm>
+            <a:off x="0" y="0"/>
+            <a:ext cx="2971800" cy="458788"/>
+          </a:xfrm>
+          <a:prstGeom prst="rect">
+            <a:avLst/>
+          </a:prstGeom>
+        </p:spPr>
+        <p:txBody>
+          <a:bodyPr vert="horz" lIns="91440" tIns="45720" rIns="91440" bIns="45720" rtlCol="0"/>
+          <a:lstStyle>
+            <a:lvl1pPr algn="l">
+              <a:defRPr sz="1200"/>
+            </a:lvl1pPr>
+          </a:lstStyle>
+          <a:p>
+            <a:endParaRPr lang="de-DE"/>
+          </a:p>
+        </p:txBody>
+      </p:sp>
+      <p:sp>
+        <p:nvSpPr>
+          <p:cNvPr id="4" name="Fußzeilenplatzhalter 3">
+            <a:extLst>
+              <a:ext uri="{FF2B5EF4-FFF2-40B4-BE49-F238E27FC236}">
+                <a16:creationId xmlns:a16="http://schemas.microsoft.com/office/drawing/2014/main" id="{77150869-4EB4-AE84-653E-A7F5BCEF5BF0}"/>
+              </a:ext>
+            </a:extLst>
+          </p:cNvPr>
+          <p:cNvSpPr>
+            <a:spLocks noGrp="1"/>
+          </p:cNvSpPr>
+          <p:nvPr>
+            <p:ph type="ftr" sz="quarter" idx="2"/>
+          </p:nvPr>
+        </p:nvSpPr>
+        <p:spPr>
+          <a:xfrm>
+            <a:off x="0" y="8685213"/>
+            <a:ext cx="2971800" cy="458787"/>
+          </a:xfrm>
+          <a:prstGeom prst="rect">
+            <a:avLst/>
+          </a:prstGeom>
+        </p:spPr>
+        <p:txBody>
+          <a:bodyPr vert="horz" lIns="91440" tIns="45720" rIns="91440" bIns="45720" rtlCol="0" anchor="b"/>
+          <a:lstStyle>
+            <a:lvl1pPr algn="l">
+              <a:defRPr sz="1200"/>
+            </a:lvl1pPr>
+          </a:lstStyle>
+          <a:p>
+            <a:endParaRPr lang="de-DE"/>
+          </a:p>
+        </p:txBody>
+      </p:sp>
+      <p:sp>
+        <p:nvSpPr>
+          <p:cNvPr id="5" name="Foliennummernplatzhalter 4">
+            <a:extLst>
+              <a:ext uri="{FF2B5EF4-FFF2-40B4-BE49-F238E27FC236}">
+                <a16:creationId xmlns:a16="http://schemas.microsoft.com/office/drawing/2014/main" id="{B64FC74E-8D4D-CDEA-B64F-A86A9D4510EF}"/>
+              </a:ext>
+            </a:extLst>
+          </p:cNvPr>
+          <p:cNvSpPr>
+            <a:spLocks noGrp="1"/>
+          </p:cNvSpPr>
+          <p:nvPr>
+            <p:ph type="sldNum" sz="quarter" idx="3"/>
+          </p:nvPr>
+        </p:nvSpPr>
+        <p:spPr>
+          <a:xfrm>
+            <a:off x="3884613" y="8685213"/>
+            <a:ext cx="2971800" cy="458787"/>
+          </a:xfrm>
+          <a:prstGeom prst="rect">
+            <a:avLst/>
+          </a:prstGeom>
+        </p:spPr>
+        <p:txBody>
+          <a:bodyPr vert="horz" lIns="91440" tIns="45720" rIns="91440" bIns="45720" rtlCol="0" anchor="b"/>
+          <a:lstStyle>
+            <a:lvl1pPr algn="r">
+              <a:defRPr sz="1200"/>
+            </a:lvl1pPr>
+          </a:lstStyle>
+          <a:p>
+            <a:fld id="{3E98CE83-0405-4231-BD80-FF07552D0473}" type="slidenum">
+              <a:rPr lang="de-DE" smtClean="0"/>
+              <a:t>‹Nr.›</a:t>
+            </a:fld>
+            <a:endParaRPr lang="de-DE"/>
+          </a:p>
+        </p:txBody>
+      </p:sp>
+    </p:spTree>
+    <p:extLst>
+      <p:ext uri="{BB962C8B-B14F-4D97-AF65-F5344CB8AC3E}">
+        <p14:creationId xmlns:p14="http://schemas.microsoft.com/office/powerpoint/2010/main" val="4200839221"/>
+      </p:ext>
+    </p:extLst>
+  </p:cSld>
+  <p:clrMap bg1="lt1" tx1="dk1" bg2="lt2" tx2="dk2" accent1="accent1" accent2="accent2" accent3="accent3" accent4="accent4" accent5="accent5" accent6="accent6" hlink="hlink" folHlink="folHlink"/>
+</p:handoutMaster>
+</file>
+
 <file path=ppt/notesMasters/notesMaster1.xml><?xml version="1.0" encoding="utf-8"?>
 <p:notesMaster xmlns:a="http://schemas.openxmlformats.org/drawingml/2006/main" xmlns:r="http://schemas.openxmlformats.org/officeDocument/2006/relationships" xmlns:p="http://schemas.openxmlformats.org/presentationml/2006/main">
   <p:cSld>
@@ -19570,4 +19721,319 @@
     </a:ext>
   </a:extLst>
 </a:theme>
+</file>
+
+<file path=ppt/theme/theme3.xml><?xml version="1.0" encoding="utf-8"?>
+<a:theme xmlns:a="http://schemas.openxmlformats.org/drawingml/2006/main" name="Office">
+  <a:themeElements>
+    <a:clrScheme name="Office">
+      <a:dk1>
+        <a:sysClr val="windowText" lastClr="000000"/>
+      </a:dk1>
+      <a:lt1>
+        <a:sysClr val="window" lastClr="FFFFFF"/>
+      </a:lt1>
+      <a:dk2>
+        <a:srgbClr val="0E2841"/>
+      </a:dk2>
+      <a:lt2>
+        <a:srgbClr val="E8E8E8"/>
+      </a:lt2>
+      <a:accent1>
+        <a:srgbClr val="156082"/>
+      </a:accent1>
+      <a:accent2>
+        <a:srgbClr val="E97132"/>
+      </a:accent2>
+      <a:accent3>
+        <a:srgbClr val="196B24"/>
+      </a:accent3>
+      <a:accent4>
+        <a:srgbClr val="0F9ED5"/>
+      </a:accent4>
+      <a:accent5>
+        <a:srgbClr val="A02B93"/>
+      </a:accent5>
+      <a:accent6>
+        <a:srgbClr val="4EA72E"/>
+      </a:accent6>
+      <a:hlink>
+        <a:srgbClr val="467886"/>
+      </a:hlink>
+      <a:folHlink>
+        <a:srgbClr val="96607D"/>
+      </a:folHlink>
+    </a:clrScheme>
+    <a:fontScheme name="Office">
+      <a:majorFont>
+        <a:latin typeface="Aptos Display" panose="02110004020202020204"/>
+        <a:ea typeface=""/>
+        <a:cs typeface=""/>
+        <a:font script="Jpan" typeface="游ゴシック Light"/>
+        <a:font script="Hang" typeface="맑은 고딕"/>
+        <a:font script="Hans" typeface="等线 Light"/>
+        <a:font script="Hant" typeface="新細明體"/>
+        <a:font script="Arab" typeface="Times New Roman"/>
+        <a:font script="Hebr" typeface="Times New Roman"/>
+        <a:font script="Thai" typeface="Angsana New"/>
+        <a:font script="Ethi" typeface="Nyala"/>
+        <a:font script="Beng" typeface="Vrinda"/>
+        <a:font script="Gujr" typeface="Shruti"/>
+        <a:font script="Khmr" typeface="MoolBoran"/>
+        <a:font script="Knda" typeface="Tunga"/>
+        <a:font script="Guru" typeface="Raavi"/>
+        <a:font script="Cans" typeface="Euphemia"/>
+        <a:font script="Cher" typeface="Plantagenet Cherokee"/>
+        <a:font script="Yiii" typeface="Microsoft Yi Baiti"/>
+        <a:font script="Tibt" typeface="Microsoft Himalaya"/>
+        <a:font script="Thaa" typeface="MV Boli"/>
+        <a:font script="Deva" typeface="Mangal"/>
+        <a:font script="Telu" typeface="Gautami"/>
+        <a:font script="Taml" typeface="Latha"/>
+        <a:font script="Syrc" typeface="Estrangelo Edessa"/>
+        <a:font script="Orya" typeface="Kalinga"/>
+        <a:font script="Mlym" typeface="Kartika"/>
+        <a:font script="Laoo" typeface="DokChampa"/>
+        <a:font script="Sinh" typeface="Iskoola Pota"/>
+        <a:font script="Mong" typeface="Mongolian Baiti"/>
+        <a:font script="Viet" typeface="Times New Roman"/>
+        <a:font script="Uigh" typeface="Microsoft Uighur"/>
+        <a:font script="Geor" typeface="Sylfaen"/>
+        <a:font script="Armn" typeface="Arial"/>
+        <a:font script="Bugi" typeface="Leelawadee UI"/>
+        <a:font script="Bopo" typeface="Microsoft JhengHei"/>
+        <a:font script="Java" typeface="Javanese Text"/>
+        <a:font script="Lisu" typeface="Segoe UI"/>
+        <a:font script="Mymr" typeface="Myanmar Text"/>
+        <a:font script="Nkoo" typeface="Ebrima"/>
+        <a:font script="Olck" typeface="Nirmala UI"/>
+        <a:font script="Osma" typeface="Ebrima"/>
+        <a:font script="Phag" typeface="Phagspa"/>
+        <a:font script="Syrn" typeface="Estrangelo Edessa"/>
+        <a:font script="Syrj" typeface="Estrangelo Edessa"/>
+        <a:font script="Syre" typeface="Estrangelo Edessa"/>
+        <a:font script="Sora" typeface="Nirmala UI"/>
+        <a:font script="Tale" typeface="Microsoft Tai Le"/>
+        <a:font script="Talu" typeface="Microsoft New Tai Lue"/>
+        <a:font script="Tfng" typeface="Ebrima"/>
+      </a:majorFont>
+      <a:minorFont>
+        <a:latin typeface="Aptos" panose="02110004020202020204"/>
+        <a:ea typeface=""/>
+        <a:cs typeface=""/>
+        <a:font script="Jpan" typeface="游ゴシック"/>
+        <a:font script="Hang" typeface="맑은 고딕"/>
+        <a:font script="Hans" typeface="等线"/>
+        <a:font script="Hant" typeface="新細明體"/>
+        <a:font script="Arab" typeface="Arial"/>
+        <a:font script="Hebr" typeface="Arial"/>
+        <a:font script="Thai" typeface="Cordia New"/>
+        <a:font script="Ethi" typeface="Nyala"/>
+        <a:font script="Beng" typeface="Vrinda"/>
+        <a:font script="Gujr" typeface="Shruti"/>
+        <a:font script="Khmr" typeface="DaunPenh"/>
+        <a:font script="Knda" typeface="Tunga"/>
+        <a:font script="Guru" typeface="Raavi"/>
+        <a:font script="Cans" typeface="Euphemia"/>
+        <a:font script="Cher" typeface="Plantagenet Cherokee"/>
+        <a:font script="Yiii" typeface="Microsoft Yi Baiti"/>
+        <a:font script="Tibt" typeface="Microsoft Himalaya"/>
+        <a:font script="Thaa" typeface="MV Boli"/>
+        <a:font script="Deva" typeface="Mangal"/>
+        <a:font script="Telu" typeface="Gautami"/>
+        <a:font script="Taml" typeface="Latha"/>
+        <a:font script="Syrc" typeface="Estrangelo Edessa"/>
+        <a:font script="Orya" typeface="Kalinga"/>
+        <a:font script="Mlym" typeface="Kartika"/>
+        <a:font script="Laoo" typeface="DokChampa"/>
+        <a:font script="Sinh" typeface="Iskoola Pota"/>
+        <a:font script="Mong" typeface="Mongolian Baiti"/>
+        <a:font script="Viet" typeface="Arial"/>
+        <a:font script="Uigh" typeface="Microsoft Uighur"/>
+        <a:font script="Geor" typeface="Sylfaen"/>
+        <a:font script="Armn" typeface="Arial"/>
+        <a:font script="Bugi" typeface="Leelawadee UI"/>
+        <a:font script="Bopo" typeface="Microsoft JhengHei"/>
+        <a:font script="Java" typeface="Javanese Text"/>
+        <a:font script="Lisu" typeface="Segoe UI"/>
+        <a:font script="Mymr" typeface="Myanmar Text"/>
+        <a:font script="Nkoo" typeface="Ebrima"/>
+        <a:font script="Olck" typeface="Nirmala UI"/>
+        <a:font script="Osma" typeface="Ebrima"/>
+        <a:font script="Phag" typeface="Phagspa"/>
+        <a:font script="Syrn" typeface="Estrangelo Edessa"/>
+        <a:font script="Syrj" typeface="Estrangelo Edessa"/>
+        <a:font script="Syre" typeface="Estrangelo Edessa"/>
+        <a:font script="Sora" typeface="Nirmala UI"/>
+        <a:font script="Tale" typeface="Microsoft Tai Le"/>
+        <a:font script="Talu" typeface="Microsoft New Tai Lue"/>
+        <a:font script="Tfng" typeface="Ebrima"/>
+      </a:minorFont>
+    </a:fontScheme>
+    <a:fmtScheme name="Office">
+      <a:fillStyleLst>
+        <a:solidFill>
+          <a:schemeClr val="phClr"/>
+        </a:solidFill>
+        <a:gradFill rotWithShape="1">
+          <a:gsLst>
+            <a:gs pos="0">
+              <a:schemeClr val="phClr">
+                <a:lumMod val="110000"/>
+                <a:satMod val="105000"/>
+                <a:tint val="67000"/>
+              </a:schemeClr>
+            </a:gs>
+            <a:gs pos="50000">
+              <a:schemeClr val="phClr">
+                <a:lumMod val="105000"/>
+                <a:satMod val="103000"/>
+                <a:tint val="73000"/>
+              </a:schemeClr>
+            </a:gs>
+            <a:gs pos="100000">
+              <a:schemeClr val="phClr">
+                <a:lumMod val="105000"/>
+                <a:satMod val="109000"/>
+                <a:tint val="81000"/>
+              </a:schemeClr>
+            </a:gs>
+          </a:gsLst>
+          <a:lin ang="5400000" scaled="0"/>
+        </a:gradFill>
+        <a:gradFill rotWithShape="1">
+          <a:gsLst>
+            <a:gs pos="0">
+              <a:schemeClr val="phClr">
+                <a:satMod val="103000"/>
+                <a:lumMod val="102000"/>
+                <a:tint val="94000"/>
+              </a:schemeClr>
+            </a:gs>
+            <a:gs pos="50000">
+              <a:schemeClr val="phClr">
+                <a:satMod val="110000"/>
+                <a:lumMod val="100000"/>
+                <a:shade val="100000"/>
+              </a:schemeClr>
+            </a:gs>
+            <a:gs pos="100000">
+              <a:schemeClr val="phClr">
+                <a:lumMod val="99000"/>
+                <a:satMod val="120000"/>
+                <a:shade val="78000"/>
+              </a:schemeClr>
+            </a:gs>
+          </a:gsLst>
+          <a:lin ang="5400000" scaled="0"/>
+        </a:gradFill>
+      </a:fillStyleLst>
+      <a:lnStyleLst>
+        <a:ln w="12700" cap="flat" cmpd="sng" algn="ctr">
+          <a:solidFill>
+            <a:schemeClr val="phClr"/>
+          </a:solidFill>
+          <a:prstDash val="solid"/>
+          <a:miter lim="800000"/>
+        </a:ln>
+        <a:ln w="19050" cap="flat" cmpd="sng" algn="ctr">
+          <a:solidFill>
+            <a:schemeClr val="phClr"/>
+          </a:solidFill>
+          <a:prstDash val="solid"/>
+          <a:miter lim="800000"/>
+        </a:ln>
+        <a:ln w="25400" cap="flat" cmpd="sng" algn="ctr">
+          <a:solidFill>
+            <a:schemeClr val="phClr"/>
+          </a:solidFill>
+          <a:prstDash val="solid"/>
+          <a:miter lim="800000"/>
+        </a:ln>
+      </a:lnStyleLst>
+      <a:effectStyleLst>
+        <a:effectStyle>
+          <a:effectLst/>
+        </a:effectStyle>
+        <a:effectStyle>
+          <a:effectLst/>
+        </a:effectStyle>
+        <a:effectStyle>
+          <a:effectLst>
+            <a:outerShdw blurRad="57150" dist="19050" dir="5400000" algn="ctr" rotWithShape="0">
+              <a:srgbClr val="000000">
+                <a:alpha val="63000"/>
+              </a:srgbClr>
+            </a:outerShdw>
+          </a:effectLst>
+        </a:effectStyle>
+      </a:effectStyleLst>
+      <a:bgFillStyleLst>
+        <a:solidFill>
+          <a:schemeClr val="phClr"/>
+        </a:solidFill>
+        <a:solidFill>
+          <a:schemeClr val="phClr">
+            <a:tint val="95000"/>
+            <a:satMod val="170000"/>
+          </a:schemeClr>
+        </a:solidFill>
+        <a:gradFill rotWithShape="1">
+          <a:gsLst>
+            <a:gs pos="0">
+              <a:schemeClr val="phClr">
+                <a:tint val="93000"/>
+                <a:satMod val="150000"/>
+                <a:shade val="98000"/>
+                <a:lumMod val="102000"/>
+              </a:schemeClr>
+            </a:gs>
+            <a:gs pos="50000">
+              <a:schemeClr val="phClr">
+                <a:tint val="98000"/>
+                <a:satMod val="130000"/>
+                <a:shade val="90000"/>
+                <a:lumMod val="103000"/>
+              </a:schemeClr>
+            </a:gs>
+            <a:gs pos="100000">
+              <a:schemeClr val="phClr">
+                <a:shade val="63000"/>
+                <a:satMod val="120000"/>
+              </a:schemeClr>
+            </a:gs>
+          </a:gsLst>
+          <a:lin ang="5400000" scaled="0"/>
+        </a:gradFill>
+      </a:bgFillStyleLst>
+    </a:fmtScheme>
+  </a:themeElements>
+  <a:objectDefaults>
+    <a:lnDef>
+      <a:spPr/>
+      <a:bodyPr/>
+      <a:lstStyle/>
+      <a:style>
+        <a:lnRef idx="2">
+          <a:schemeClr val="accent1"/>
+        </a:lnRef>
+        <a:fillRef idx="0">
+          <a:schemeClr val="accent1"/>
+        </a:fillRef>
+        <a:effectRef idx="1">
+          <a:schemeClr val="accent1"/>
+        </a:effectRef>
+        <a:fontRef idx="minor">
+          <a:schemeClr val="tx1"/>
+        </a:fontRef>
+      </a:style>
+    </a:lnDef>
+  </a:objectDefaults>
+  <a:extraClrSchemeLst/>
+  <a:extLst>
+    <a:ext uri="{05A4C25C-085E-4340-85A3-A5531E510DB2}">
+      <thm15:themeFamily xmlns:thm15="http://schemas.microsoft.com/office/thememl/2012/main" name="Office Theme" id="{2E142A2C-CD16-42D6-873A-C26D2A0506FA}" vid="{1BDDFF52-6CD6-40A5-AB3C-68EB2F1E4D0A}"/>
+    </a:ext>
+  </a:extLst>
+</a:theme>
 </file>
--- a/Woche_6_Projektstart/Woche_6_Projektstart_v01.pptx
+++ b/Woche_6_Projektstart/Woche_6_Projektstart_v01.pptx
@@ -169,7 +169,7 @@
 <file path=ppt/revisionInfo.xml><?xml version="1.0" encoding="utf-8"?>
 <p1510:revInfo xmlns:a="http://schemas.openxmlformats.org/drawingml/2006/main" xmlns:r="http://schemas.openxmlformats.org/officeDocument/2006/relationships" xmlns:p1510="http://schemas.microsoft.com/office/powerpoint/2015/10/main">
   <p1510:revLst>
-    <p1510:client id="{B2BB12B1-FB4E-4F31-87A7-6AA76B32EA74}" v="19" dt="2026-04-21T11:21:37.330"/>
+    <p1510:client id="{B1F127F4-DEC5-41D9-977A-3B1282D851A9}" v="2" dt="2026-04-23T14:17:39.921"/>
   </p1510:revLst>
 </p1510:revInfo>
 </file>
@@ -183,300 +183,6 @@
       <pc:docMkLst>
         <pc:docMk/>
       </pc:docMkLst>
-      <pc:sldChg chg="del">
-        <pc:chgData name="Peter Bernhardt" userId="f2333933-0b12-4d6e-972f-f87625423892" providerId="ADAL" clId="{2C628E33-589C-449E-BBA5-ED05E3E5CC01}" dt="2026-04-21T08:37:37.791" v="1" actId="47"/>
-        <pc:sldMkLst>
-          <pc:docMk/>
-          <pc:sldMk cId="0" sldId="256"/>
-        </pc:sldMkLst>
-      </pc:sldChg>
-      <pc:sldChg chg="del">
-        <pc:chgData name="Peter Bernhardt" userId="f2333933-0b12-4d6e-972f-f87625423892" providerId="ADAL" clId="{2C628E33-589C-449E-BBA5-ED05E3E5CC01}" dt="2026-04-21T08:37:37.791" v="1" actId="47"/>
-        <pc:sldMkLst>
-          <pc:docMk/>
-          <pc:sldMk cId="0" sldId="257"/>
-        </pc:sldMkLst>
-      </pc:sldChg>
-      <pc:sldChg chg="del">
-        <pc:chgData name="Peter Bernhardt" userId="f2333933-0b12-4d6e-972f-f87625423892" providerId="ADAL" clId="{2C628E33-589C-449E-BBA5-ED05E3E5CC01}" dt="2026-04-21T08:37:37.791" v="1" actId="47"/>
-        <pc:sldMkLst>
-          <pc:docMk/>
-          <pc:sldMk cId="0" sldId="258"/>
-        </pc:sldMkLst>
-      </pc:sldChg>
-      <pc:sldChg chg="del">
-        <pc:chgData name="Peter Bernhardt" userId="f2333933-0b12-4d6e-972f-f87625423892" providerId="ADAL" clId="{2C628E33-589C-449E-BBA5-ED05E3E5CC01}" dt="2026-04-21T08:37:37.791" v="1" actId="47"/>
-        <pc:sldMkLst>
-          <pc:docMk/>
-          <pc:sldMk cId="0" sldId="259"/>
-        </pc:sldMkLst>
-      </pc:sldChg>
-      <pc:sldChg chg="del">
-        <pc:chgData name="Peter Bernhardt" userId="f2333933-0b12-4d6e-972f-f87625423892" providerId="ADAL" clId="{2C628E33-589C-449E-BBA5-ED05E3E5CC01}" dt="2026-04-21T08:37:37.791" v="1" actId="47"/>
-        <pc:sldMkLst>
-          <pc:docMk/>
-          <pc:sldMk cId="0" sldId="260"/>
-        </pc:sldMkLst>
-      </pc:sldChg>
-      <pc:sldChg chg="del">
-        <pc:chgData name="Peter Bernhardt" userId="f2333933-0b12-4d6e-972f-f87625423892" providerId="ADAL" clId="{2C628E33-589C-449E-BBA5-ED05E3E5CC01}" dt="2026-04-21T08:37:37.791" v="1" actId="47"/>
-        <pc:sldMkLst>
-          <pc:docMk/>
-          <pc:sldMk cId="0" sldId="261"/>
-        </pc:sldMkLst>
-      </pc:sldChg>
-      <pc:sldChg chg="del">
-        <pc:chgData name="Peter Bernhardt" userId="f2333933-0b12-4d6e-972f-f87625423892" providerId="ADAL" clId="{2C628E33-589C-449E-BBA5-ED05E3E5CC01}" dt="2026-04-21T08:37:37.791" v="1" actId="47"/>
-        <pc:sldMkLst>
-          <pc:docMk/>
-          <pc:sldMk cId="0" sldId="262"/>
-        </pc:sldMkLst>
-      </pc:sldChg>
-      <pc:sldChg chg="del">
-        <pc:chgData name="Peter Bernhardt" userId="f2333933-0b12-4d6e-972f-f87625423892" providerId="ADAL" clId="{2C628E33-589C-449E-BBA5-ED05E3E5CC01}" dt="2026-04-21T08:37:37.791" v="1" actId="47"/>
-        <pc:sldMkLst>
-          <pc:docMk/>
-          <pc:sldMk cId="0" sldId="263"/>
-        </pc:sldMkLst>
-      </pc:sldChg>
-      <pc:sldChg chg="del">
-        <pc:chgData name="Peter Bernhardt" userId="f2333933-0b12-4d6e-972f-f87625423892" providerId="ADAL" clId="{2C628E33-589C-449E-BBA5-ED05E3E5CC01}" dt="2026-04-21T08:37:37.791" v="1" actId="47"/>
-        <pc:sldMkLst>
-          <pc:docMk/>
-          <pc:sldMk cId="0" sldId="264"/>
-        </pc:sldMkLst>
-      </pc:sldChg>
-      <pc:sldChg chg="del">
-        <pc:chgData name="Peter Bernhardt" userId="f2333933-0b12-4d6e-972f-f87625423892" providerId="ADAL" clId="{2C628E33-589C-449E-BBA5-ED05E3E5CC01}" dt="2026-04-21T08:37:37.791" v="1" actId="47"/>
-        <pc:sldMkLst>
-          <pc:docMk/>
-          <pc:sldMk cId="0" sldId="265"/>
-        </pc:sldMkLst>
-      </pc:sldChg>
-      <pc:sldChg chg="del">
-        <pc:chgData name="Peter Bernhardt" userId="f2333933-0b12-4d6e-972f-f87625423892" providerId="ADAL" clId="{2C628E33-589C-449E-BBA5-ED05E3E5CC01}" dt="2026-04-21T08:37:37.791" v="1" actId="47"/>
-        <pc:sldMkLst>
-          <pc:docMk/>
-          <pc:sldMk cId="0" sldId="266"/>
-        </pc:sldMkLst>
-      </pc:sldChg>
-      <pc:sldChg chg="del">
-        <pc:chgData name="Peter Bernhardt" userId="f2333933-0b12-4d6e-972f-f87625423892" providerId="ADAL" clId="{2C628E33-589C-449E-BBA5-ED05E3E5CC01}" dt="2026-04-21T08:37:37.791" v="1" actId="47"/>
-        <pc:sldMkLst>
-          <pc:docMk/>
-          <pc:sldMk cId="0" sldId="267"/>
-        </pc:sldMkLst>
-      </pc:sldChg>
-      <pc:sldChg chg="del">
-        <pc:chgData name="Peter Bernhardt" userId="f2333933-0b12-4d6e-972f-f87625423892" providerId="ADAL" clId="{2C628E33-589C-449E-BBA5-ED05E3E5CC01}" dt="2026-04-21T08:37:37.791" v="1" actId="47"/>
-        <pc:sldMkLst>
-          <pc:docMk/>
-          <pc:sldMk cId="0" sldId="268"/>
-        </pc:sldMkLst>
-      </pc:sldChg>
-      <pc:sldChg chg="del">
-        <pc:chgData name="Peter Bernhardt" userId="f2333933-0b12-4d6e-972f-f87625423892" providerId="ADAL" clId="{2C628E33-589C-449E-BBA5-ED05E3E5CC01}" dt="2026-04-21T08:37:37.791" v="1" actId="47"/>
-        <pc:sldMkLst>
-          <pc:docMk/>
-          <pc:sldMk cId="0" sldId="269"/>
-        </pc:sldMkLst>
-      </pc:sldChg>
-      <pc:sldChg chg="del">
-        <pc:chgData name="Peter Bernhardt" userId="f2333933-0b12-4d6e-972f-f87625423892" providerId="ADAL" clId="{2C628E33-589C-449E-BBA5-ED05E3E5CC01}" dt="2026-04-21T08:37:37.791" v="1" actId="47"/>
-        <pc:sldMkLst>
-          <pc:docMk/>
-          <pc:sldMk cId="0" sldId="270"/>
-        </pc:sldMkLst>
-      </pc:sldChg>
-      <pc:sldChg chg="del">
-        <pc:chgData name="Peter Bernhardt" userId="f2333933-0b12-4d6e-972f-f87625423892" providerId="ADAL" clId="{2C628E33-589C-449E-BBA5-ED05E3E5CC01}" dt="2026-04-21T08:37:37.791" v="1" actId="47"/>
-        <pc:sldMkLst>
-          <pc:docMk/>
-          <pc:sldMk cId="0" sldId="271"/>
-        </pc:sldMkLst>
-      </pc:sldChg>
-      <pc:sldChg chg="del">
-        <pc:chgData name="Peter Bernhardt" userId="f2333933-0b12-4d6e-972f-f87625423892" providerId="ADAL" clId="{2C628E33-589C-449E-BBA5-ED05E3E5CC01}" dt="2026-04-21T08:37:37.791" v="1" actId="47"/>
-        <pc:sldMkLst>
-          <pc:docMk/>
-          <pc:sldMk cId="0" sldId="272"/>
-        </pc:sldMkLst>
-      </pc:sldChg>
-      <pc:sldChg chg="del">
-        <pc:chgData name="Peter Bernhardt" userId="f2333933-0b12-4d6e-972f-f87625423892" providerId="ADAL" clId="{2C628E33-589C-449E-BBA5-ED05E3E5CC01}" dt="2026-04-21T08:37:37.791" v="1" actId="47"/>
-        <pc:sldMkLst>
-          <pc:docMk/>
-          <pc:sldMk cId="0" sldId="273"/>
-        </pc:sldMkLst>
-      </pc:sldChg>
-      <pc:sldChg chg="del">
-        <pc:chgData name="Peter Bernhardt" userId="f2333933-0b12-4d6e-972f-f87625423892" providerId="ADAL" clId="{2C628E33-589C-449E-BBA5-ED05E3E5CC01}" dt="2026-04-21T08:37:37.791" v="1" actId="47"/>
-        <pc:sldMkLst>
-          <pc:docMk/>
-          <pc:sldMk cId="0" sldId="274"/>
-        </pc:sldMkLst>
-      </pc:sldChg>
-      <pc:sldChg chg="del">
-        <pc:chgData name="Peter Bernhardt" userId="f2333933-0b12-4d6e-972f-f87625423892" providerId="ADAL" clId="{2C628E33-589C-449E-BBA5-ED05E3E5CC01}" dt="2026-04-21T08:37:37.791" v="1" actId="47"/>
-        <pc:sldMkLst>
-          <pc:docMk/>
-          <pc:sldMk cId="0" sldId="275"/>
-        </pc:sldMkLst>
-      </pc:sldChg>
-      <pc:sldChg chg="del">
-        <pc:chgData name="Peter Bernhardt" userId="f2333933-0b12-4d6e-972f-f87625423892" providerId="ADAL" clId="{2C628E33-589C-449E-BBA5-ED05E3E5CC01}" dt="2026-04-21T08:37:37.791" v="1" actId="47"/>
-        <pc:sldMkLst>
-          <pc:docMk/>
-          <pc:sldMk cId="0" sldId="276"/>
-        </pc:sldMkLst>
-      </pc:sldChg>
-      <pc:sldChg chg="del">
-        <pc:chgData name="Peter Bernhardt" userId="f2333933-0b12-4d6e-972f-f87625423892" providerId="ADAL" clId="{2C628E33-589C-449E-BBA5-ED05E3E5CC01}" dt="2026-04-21T08:37:37.791" v="1" actId="47"/>
-        <pc:sldMkLst>
-          <pc:docMk/>
-          <pc:sldMk cId="0" sldId="277"/>
-        </pc:sldMkLst>
-      </pc:sldChg>
-      <pc:sldChg chg="del">
-        <pc:chgData name="Peter Bernhardt" userId="f2333933-0b12-4d6e-972f-f87625423892" providerId="ADAL" clId="{2C628E33-589C-449E-BBA5-ED05E3E5CC01}" dt="2026-04-21T08:37:37.791" v="1" actId="47"/>
-        <pc:sldMkLst>
-          <pc:docMk/>
-          <pc:sldMk cId="0" sldId="278"/>
-        </pc:sldMkLst>
-      </pc:sldChg>
-      <pc:sldChg chg="del">
-        <pc:chgData name="Peter Bernhardt" userId="f2333933-0b12-4d6e-972f-f87625423892" providerId="ADAL" clId="{2C628E33-589C-449E-BBA5-ED05E3E5CC01}" dt="2026-04-21T08:37:37.791" v="1" actId="47"/>
-        <pc:sldMkLst>
-          <pc:docMk/>
-          <pc:sldMk cId="0" sldId="279"/>
-        </pc:sldMkLst>
-      </pc:sldChg>
-      <pc:sldChg chg="del">
-        <pc:chgData name="Peter Bernhardt" userId="f2333933-0b12-4d6e-972f-f87625423892" providerId="ADAL" clId="{2C628E33-589C-449E-BBA5-ED05E3E5CC01}" dt="2026-04-21T08:37:37.791" v="1" actId="47"/>
-        <pc:sldMkLst>
-          <pc:docMk/>
-          <pc:sldMk cId="0" sldId="280"/>
-        </pc:sldMkLst>
-      </pc:sldChg>
-      <pc:sldChg chg="del">
-        <pc:chgData name="Peter Bernhardt" userId="f2333933-0b12-4d6e-972f-f87625423892" providerId="ADAL" clId="{2C628E33-589C-449E-BBA5-ED05E3E5CC01}" dt="2026-04-21T08:37:37.791" v="1" actId="47"/>
-        <pc:sldMkLst>
-          <pc:docMk/>
-          <pc:sldMk cId="0" sldId="281"/>
-        </pc:sldMkLst>
-      </pc:sldChg>
-      <pc:sldChg chg="del">
-        <pc:chgData name="Peter Bernhardt" userId="f2333933-0b12-4d6e-972f-f87625423892" providerId="ADAL" clId="{2C628E33-589C-449E-BBA5-ED05E3E5CC01}" dt="2026-04-21T08:37:37.791" v="1" actId="47"/>
-        <pc:sldMkLst>
-          <pc:docMk/>
-          <pc:sldMk cId="0" sldId="282"/>
-        </pc:sldMkLst>
-      </pc:sldChg>
-      <pc:sldChg chg="del">
-        <pc:chgData name="Peter Bernhardt" userId="f2333933-0b12-4d6e-972f-f87625423892" providerId="ADAL" clId="{2C628E33-589C-449E-BBA5-ED05E3E5CC01}" dt="2026-04-21T08:37:37.791" v="1" actId="47"/>
-        <pc:sldMkLst>
-          <pc:docMk/>
-          <pc:sldMk cId="0" sldId="283"/>
-        </pc:sldMkLst>
-      </pc:sldChg>
-      <pc:sldChg chg="del">
-        <pc:chgData name="Peter Bernhardt" userId="f2333933-0b12-4d6e-972f-f87625423892" providerId="ADAL" clId="{2C628E33-589C-449E-BBA5-ED05E3E5CC01}" dt="2026-04-21T08:37:37.791" v="1" actId="47"/>
-        <pc:sldMkLst>
-          <pc:docMk/>
-          <pc:sldMk cId="0" sldId="284"/>
-        </pc:sldMkLst>
-      </pc:sldChg>
-      <pc:sldChg chg="del">
-        <pc:chgData name="Peter Bernhardt" userId="f2333933-0b12-4d6e-972f-f87625423892" providerId="ADAL" clId="{2C628E33-589C-449E-BBA5-ED05E3E5CC01}" dt="2026-04-21T08:37:37.791" v="1" actId="47"/>
-        <pc:sldMkLst>
-          <pc:docMk/>
-          <pc:sldMk cId="0" sldId="285"/>
-        </pc:sldMkLst>
-      </pc:sldChg>
-      <pc:sldChg chg="del">
-        <pc:chgData name="Peter Bernhardt" userId="f2333933-0b12-4d6e-972f-f87625423892" providerId="ADAL" clId="{2C628E33-589C-449E-BBA5-ED05E3E5CC01}" dt="2026-04-21T08:37:37.791" v="1" actId="47"/>
-        <pc:sldMkLst>
-          <pc:docMk/>
-          <pc:sldMk cId="0" sldId="286"/>
-        </pc:sldMkLst>
-      </pc:sldChg>
-      <pc:sldChg chg="del">
-        <pc:chgData name="Peter Bernhardt" userId="f2333933-0b12-4d6e-972f-f87625423892" providerId="ADAL" clId="{2C628E33-589C-449E-BBA5-ED05E3E5CC01}" dt="2026-04-21T08:37:37.791" v="1" actId="47"/>
-        <pc:sldMkLst>
-          <pc:docMk/>
-          <pc:sldMk cId="0" sldId="287"/>
-        </pc:sldMkLst>
-      </pc:sldChg>
-      <pc:sldChg chg="del">
-        <pc:chgData name="Peter Bernhardt" userId="f2333933-0b12-4d6e-972f-f87625423892" providerId="ADAL" clId="{2C628E33-589C-449E-BBA5-ED05E3E5CC01}" dt="2026-04-21T08:37:37.791" v="1" actId="47"/>
-        <pc:sldMkLst>
-          <pc:docMk/>
-          <pc:sldMk cId="0" sldId="288"/>
-        </pc:sldMkLst>
-      </pc:sldChg>
-      <pc:sldChg chg="del">
-        <pc:chgData name="Peter Bernhardt" userId="f2333933-0b12-4d6e-972f-f87625423892" providerId="ADAL" clId="{2C628E33-589C-449E-BBA5-ED05E3E5CC01}" dt="2026-04-21T08:37:37.791" v="1" actId="47"/>
-        <pc:sldMkLst>
-          <pc:docMk/>
-          <pc:sldMk cId="0" sldId="289"/>
-        </pc:sldMkLst>
-      </pc:sldChg>
-      <pc:sldChg chg="del">
-        <pc:chgData name="Peter Bernhardt" userId="f2333933-0b12-4d6e-972f-f87625423892" providerId="ADAL" clId="{2C628E33-589C-449E-BBA5-ED05E3E5CC01}" dt="2026-04-21T08:37:37.791" v="1" actId="47"/>
-        <pc:sldMkLst>
-          <pc:docMk/>
-          <pc:sldMk cId="0" sldId="290"/>
-        </pc:sldMkLst>
-      </pc:sldChg>
-      <pc:sldChg chg="del">
-        <pc:chgData name="Peter Bernhardt" userId="f2333933-0b12-4d6e-972f-f87625423892" providerId="ADAL" clId="{2C628E33-589C-449E-BBA5-ED05E3E5CC01}" dt="2026-04-21T08:37:37.791" v="1" actId="47"/>
-        <pc:sldMkLst>
-          <pc:docMk/>
-          <pc:sldMk cId="0" sldId="291"/>
-        </pc:sldMkLst>
-      </pc:sldChg>
-      <pc:sldChg chg="del">
-        <pc:chgData name="Peter Bernhardt" userId="f2333933-0b12-4d6e-972f-f87625423892" providerId="ADAL" clId="{2C628E33-589C-449E-BBA5-ED05E3E5CC01}" dt="2026-04-21T08:37:37.791" v="1" actId="47"/>
-        <pc:sldMkLst>
-          <pc:docMk/>
-          <pc:sldMk cId="0" sldId="292"/>
-        </pc:sldMkLst>
-      </pc:sldChg>
-      <pc:sldChg chg="del">
-        <pc:chgData name="Peter Bernhardt" userId="f2333933-0b12-4d6e-972f-f87625423892" providerId="ADAL" clId="{2C628E33-589C-449E-BBA5-ED05E3E5CC01}" dt="2026-04-21T08:37:37.791" v="1" actId="47"/>
-        <pc:sldMkLst>
-          <pc:docMk/>
-          <pc:sldMk cId="1813317568" sldId="294"/>
-        </pc:sldMkLst>
-      </pc:sldChg>
-      <pc:sldChg chg="del">
-        <pc:chgData name="Peter Bernhardt" userId="f2333933-0b12-4d6e-972f-f87625423892" providerId="ADAL" clId="{2C628E33-589C-449E-BBA5-ED05E3E5CC01}" dt="2026-04-21T08:37:37.791" v="1" actId="47"/>
-        <pc:sldMkLst>
-          <pc:docMk/>
-          <pc:sldMk cId="3043209551" sldId="295"/>
-        </pc:sldMkLst>
-      </pc:sldChg>
-      <pc:sldChg chg="del">
-        <pc:chgData name="Peter Bernhardt" userId="f2333933-0b12-4d6e-972f-f87625423892" providerId="ADAL" clId="{2C628E33-589C-449E-BBA5-ED05E3E5CC01}" dt="2026-04-21T08:37:37.791" v="1" actId="47"/>
-        <pc:sldMkLst>
-          <pc:docMk/>
-          <pc:sldMk cId="1123959644" sldId="296"/>
-        </pc:sldMkLst>
-      </pc:sldChg>
-      <pc:sldChg chg="del">
-        <pc:chgData name="Peter Bernhardt" userId="f2333933-0b12-4d6e-972f-f87625423892" providerId="ADAL" clId="{2C628E33-589C-449E-BBA5-ED05E3E5CC01}" dt="2026-04-21T08:37:37.791" v="1" actId="47"/>
-        <pc:sldMkLst>
-          <pc:docMk/>
-          <pc:sldMk cId="1863045288" sldId="297"/>
-        </pc:sldMkLst>
-      </pc:sldChg>
-      <pc:sldChg chg="del">
-        <pc:chgData name="Peter Bernhardt" userId="f2333933-0b12-4d6e-972f-f87625423892" providerId="ADAL" clId="{2C628E33-589C-449E-BBA5-ED05E3E5CC01}" dt="2026-04-21T08:37:37.791" v="1" actId="47"/>
-        <pc:sldMkLst>
-          <pc:docMk/>
-          <pc:sldMk cId="1538975160" sldId="298"/>
-        </pc:sldMkLst>
-      </pc:sldChg>
       <pc:sldChg chg="addSp delSp modSp add mod chgLayout">
         <pc:chgData name="Peter Bernhardt" userId="f2333933-0b12-4d6e-972f-f87625423892" providerId="ADAL" clId="{2C628E33-589C-449E-BBA5-ED05E3E5CC01}" dt="2026-04-21T08:37:51.433" v="9" actId="20577"/>
         <pc:sldMkLst>
@@ -507,30 +213,6 @@
             <ac:spMk id="4" creationId="{00000000-0000-0000-0000-000000000000}"/>
           </ac:spMkLst>
         </pc:spChg>
-        <pc:spChg chg="add del mod">
-          <ac:chgData name="Peter Bernhardt" userId="f2333933-0b12-4d6e-972f-f87625423892" providerId="ADAL" clId="{2C628E33-589C-449E-BBA5-ED05E3E5CC01}" dt="2026-04-21T08:37:48.614" v="2" actId="6264"/>
-          <ac:spMkLst>
-            <pc:docMk/>
-            <pc:sldMk cId="0" sldId="299"/>
-            <ac:spMk id="5" creationId="{5216F69E-3EEF-CADA-1FCC-CD57E5DC2EFA}"/>
-          </ac:spMkLst>
-        </pc:spChg>
-        <pc:spChg chg="add del mod">
-          <ac:chgData name="Peter Bernhardt" userId="f2333933-0b12-4d6e-972f-f87625423892" providerId="ADAL" clId="{2C628E33-589C-449E-BBA5-ED05E3E5CC01}" dt="2026-04-21T08:37:48.614" v="2" actId="6264"/>
-          <ac:spMkLst>
-            <pc:docMk/>
-            <pc:sldMk cId="0" sldId="299"/>
-            <ac:spMk id="6" creationId="{38EE3C09-958D-2E5E-0BA0-2EB0534EE1C5}"/>
-          </ac:spMkLst>
-        </pc:spChg>
-        <pc:spChg chg="add del mod">
-          <ac:chgData name="Peter Bernhardt" userId="f2333933-0b12-4d6e-972f-f87625423892" providerId="ADAL" clId="{2C628E33-589C-449E-BBA5-ED05E3E5CC01}" dt="2026-04-21T08:37:48.614" v="2" actId="6264"/>
-          <ac:spMkLst>
-            <pc:docMk/>
-            <pc:sldMk cId="0" sldId="299"/>
-            <ac:spMk id="7" creationId="{30D48EDB-C392-0641-93D4-48530AD472E4}"/>
-          </ac:spMkLst>
-        </pc:spChg>
       </pc:sldChg>
       <pc:sldChg chg="addSp delSp modSp add mod chgLayout">
         <pc:chgData name="Peter Bernhardt" userId="f2333933-0b12-4d6e-972f-f87625423892" providerId="ADAL" clId="{2C628E33-589C-449E-BBA5-ED05E3E5CC01}" dt="2026-04-21T08:38:00.793" v="12" actId="20577"/>
@@ -544,14 +226,6 @@
             <pc:docMk/>
             <pc:sldMk cId="0" sldId="300"/>
             <ac:spMk id="2" creationId="{00000000-0000-0000-0000-000000000000}"/>
-          </ac:spMkLst>
-        </pc:spChg>
-        <pc:spChg chg="add del mod">
-          <ac:chgData name="Peter Bernhardt" userId="f2333933-0b12-4d6e-972f-f87625423892" providerId="ADAL" clId="{2C628E33-589C-449E-BBA5-ED05E3E5CC01}" dt="2026-04-21T08:37:57.801" v="10" actId="6264"/>
-          <ac:spMkLst>
-            <pc:docMk/>
-            <pc:sldMk cId="0" sldId="300"/>
-            <ac:spMk id="3" creationId="{049CDC3A-D22E-9CEE-23F8-64D9AC1D7D69}"/>
           </ac:spMkLst>
         </pc:spChg>
         <pc:spChg chg="add mod ord">
@@ -651,14 +325,6 @@
             <pc:docMk/>
             <pc:sldMk cId="0" sldId="305"/>
             <ac:spMk id="2" creationId="{00000000-0000-0000-0000-000000000000}"/>
-          </ac:spMkLst>
-        </pc:spChg>
-        <pc:spChg chg="add del mod">
-          <ac:chgData name="Peter Bernhardt" userId="f2333933-0b12-4d6e-972f-f87625423892" providerId="ADAL" clId="{2C628E33-589C-449E-BBA5-ED05E3E5CC01}" dt="2026-04-21T08:38:28.062" v="17" actId="6264"/>
-          <ac:spMkLst>
-            <pc:docMk/>
-            <pc:sldMk cId="0" sldId="305"/>
-            <ac:spMk id="3" creationId="{F2DCD104-36B5-913C-2B99-BEA608611283}"/>
           </ac:spMkLst>
         </pc:spChg>
         <pc:spChg chg="add mod ord">
@@ -790,14 +456,6 @@
           <pc:docMk/>
           <pc:sldMk cId="0" sldId="312"/>
         </pc:sldMkLst>
-        <pc:spChg chg="del mod">
-          <ac:chgData name="Peter Bernhardt" userId="f2333933-0b12-4d6e-972f-f87625423892" providerId="ADAL" clId="{2C628E33-589C-449E-BBA5-ED05E3E5CC01}" dt="2026-04-21T09:48:39.320" v="1209" actId="478"/>
-          <ac:spMkLst>
-            <pc:docMk/>
-            <pc:sldMk cId="0" sldId="312"/>
-            <ac:spMk id="3" creationId="{00000000-0000-0000-0000-000000000000}"/>
-          </ac:spMkLst>
-        </pc:spChg>
         <pc:spChg chg="add mod">
           <ac:chgData name="Peter Bernhardt" userId="f2333933-0b12-4d6e-972f-f87625423892" providerId="ADAL" clId="{2C628E33-589C-449E-BBA5-ED05E3E5CC01}" dt="2026-04-21T09:49:37.023" v="1232" actId="1076"/>
           <ac:spMkLst>
@@ -859,14 +517,6 @@
             <ac:spMk id="2" creationId="{00000000-0000-0000-0000-000000000000}"/>
           </ac:spMkLst>
         </pc:spChg>
-        <pc:spChg chg="add del mod">
-          <ac:chgData name="Peter Bernhardt" userId="f2333933-0b12-4d6e-972f-f87625423892" providerId="ADAL" clId="{2C628E33-589C-449E-BBA5-ED05E3E5CC01}" dt="2026-04-21T08:39:38.271" v="33" actId="6264"/>
-          <ac:spMkLst>
-            <pc:docMk/>
-            <pc:sldMk cId="0" sldId="315"/>
-            <ac:spMk id="3" creationId="{AFCB19F3-C664-0271-FEEA-D99BBB3CC61B}"/>
-          </ac:spMkLst>
-        </pc:spChg>
         <pc:spChg chg="add mod ord">
           <ac:chgData name="Peter Bernhardt" userId="f2333933-0b12-4d6e-972f-f87625423892" providerId="ADAL" clId="{2C628E33-589C-449E-BBA5-ED05E3E5CC01}" dt="2026-04-21T08:39:38.271" v="33" actId="6264"/>
           <ac:spMkLst>
@@ -896,14 +546,6 @@
             <pc:docMk/>
             <pc:sldMk cId="0" sldId="316"/>
             <ac:spMk id="3" creationId="{00000000-0000-0000-0000-000000000000}"/>
-          </ac:spMkLst>
-        </pc:spChg>
-        <pc:spChg chg="add del mod">
-          <ac:chgData name="Peter Bernhardt" userId="f2333933-0b12-4d6e-972f-f87625423892" providerId="ADAL" clId="{2C628E33-589C-449E-BBA5-ED05E3E5CC01}" dt="2026-04-21T09:57:54.207" v="1347" actId="478"/>
-          <ac:spMkLst>
-            <pc:docMk/>
-            <pc:sldMk cId="0" sldId="316"/>
-            <ac:spMk id="5" creationId="{E9A43057-E16F-88C0-02B1-716D52799030}"/>
           </ac:spMkLst>
         </pc:spChg>
         <pc:spChg chg="add mod">
@@ -1019,14 +661,6 @@
             <ac:spMk id="3" creationId="{00000000-0000-0000-0000-000000000000}"/>
           </ac:spMkLst>
         </pc:spChg>
-        <pc:spChg chg="add del mod">
-          <ac:chgData name="Peter Bernhardt" userId="f2333933-0b12-4d6e-972f-f87625423892" providerId="ADAL" clId="{2C628E33-589C-449E-BBA5-ED05E3E5CC01}" dt="2026-04-21T10:10:31.389" v="1680" actId="478"/>
-          <ac:spMkLst>
-            <pc:docMk/>
-            <pc:sldMk cId="0" sldId="323"/>
-            <ac:spMk id="5" creationId="{6BFBBD4E-F3F9-D986-8AF9-9CB1F723FF1E}"/>
-          </ac:spMkLst>
-        </pc:spChg>
         <pc:spChg chg="add mod">
           <ac:chgData name="Peter Bernhardt" userId="f2333933-0b12-4d6e-972f-f87625423892" providerId="ADAL" clId="{2C628E33-589C-449E-BBA5-ED05E3E5CC01}" dt="2026-04-21T10:11:08.782" v="1685" actId="1076"/>
           <ac:spMkLst>
@@ -1042,28 +676,12 @@
           <pc:docMk/>
           <pc:sldMk cId="0" sldId="324"/>
         </pc:sldMkLst>
-        <pc:spChg chg="del mod">
-          <ac:chgData name="Peter Bernhardt" userId="f2333933-0b12-4d6e-972f-f87625423892" providerId="ADAL" clId="{2C628E33-589C-449E-BBA5-ED05E3E5CC01}" dt="2026-04-21T10:13:17.257" v="1743" actId="478"/>
-          <ac:spMkLst>
-            <pc:docMk/>
-            <pc:sldMk cId="0" sldId="324"/>
-            <ac:spMk id="3" creationId="{00000000-0000-0000-0000-000000000000}"/>
-          </ac:spMkLst>
-        </pc:spChg>
         <pc:spChg chg="add mod">
           <ac:chgData name="Peter Bernhardt" userId="f2333933-0b12-4d6e-972f-f87625423892" providerId="ADAL" clId="{2C628E33-589C-449E-BBA5-ED05E3E5CC01}" dt="2026-04-21T10:13:30.057" v="1746" actId="1076"/>
           <ac:spMkLst>
             <pc:docMk/>
             <pc:sldMk cId="0" sldId="324"/>
             <ac:spMk id="5" creationId="{0E194594-A0ED-1191-D5BC-F0A3251D6AA4}"/>
-          </ac:spMkLst>
-        </pc:spChg>
-        <pc:spChg chg="add del mod">
-          <ac:chgData name="Peter Bernhardt" userId="f2333933-0b12-4d6e-972f-f87625423892" providerId="ADAL" clId="{2C628E33-589C-449E-BBA5-ED05E3E5CC01}" dt="2026-04-21T10:13:21.121" v="1744" actId="478"/>
-          <ac:spMkLst>
-            <pc:docMk/>
-            <pc:sldMk cId="0" sldId="324"/>
-            <ac:spMk id="7" creationId="{C4C28B04-580C-97AA-A3F7-798D7505D8AA}"/>
           </ac:spMkLst>
         </pc:spChg>
       </pc:sldChg>
@@ -1079,14 +697,6 @@
             <pc:docMk/>
             <pc:sldMk cId="0" sldId="325"/>
             <ac:spMk id="2" creationId="{00000000-0000-0000-0000-000000000000}"/>
-          </ac:spMkLst>
-        </pc:spChg>
-        <pc:spChg chg="add del mod">
-          <ac:chgData name="Peter Bernhardt" userId="f2333933-0b12-4d6e-972f-f87625423892" providerId="ADAL" clId="{2C628E33-589C-449E-BBA5-ED05E3E5CC01}" dt="2026-04-21T08:40:41.234" v="44" actId="6264"/>
-          <ac:spMkLst>
-            <pc:docMk/>
-            <pc:sldMk cId="0" sldId="325"/>
-            <ac:spMk id="3" creationId="{8FB251E5-0F50-DE56-68CF-CB28C1A4D37A}"/>
           </ac:spMkLst>
         </pc:spChg>
         <pc:spChg chg="add mod ord">
@@ -1217,22 +827,6 @@
             <ac:spMk id="2" creationId="{A22B8489-4F8B-B7FE-1698-89117A47C320}"/>
           </ac:spMkLst>
         </pc:spChg>
-        <pc:spChg chg="del">
-          <ac:chgData name="Peter Bernhardt" userId="f2333933-0b12-4d6e-972f-f87625423892" providerId="ADAL" clId="{2C628E33-589C-449E-BBA5-ED05E3E5CC01}" dt="2026-04-21T09:44:59.012" v="1101" actId="478"/>
-          <ac:spMkLst>
-            <pc:docMk/>
-            <pc:sldMk cId="3793914736" sldId="333"/>
-            <ac:spMk id="3" creationId="{DB738211-EA8B-C38A-43A3-1E7E359FE43C}"/>
-          </ac:spMkLst>
-        </pc:spChg>
-        <pc:spChg chg="add del">
-          <ac:chgData name="Peter Bernhardt" userId="f2333933-0b12-4d6e-972f-f87625423892" providerId="ADAL" clId="{2C628E33-589C-449E-BBA5-ED05E3E5CC01}" dt="2026-04-21T09:45:05.236" v="1103" actId="478"/>
-          <ac:spMkLst>
-            <pc:docMk/>
-            <pc:sldMk cId="3793914736" sldId="333"/>
-            <ac:spMk id="4" creationId="{C5D4751F-BABC-D7B1-012E-F0510BC2B8F1}"/>
-          </ac:spMkLst>
-        </pc:spChg>
         <pc:picChg chg="add mod">
           <ac:chgData name="Peter Bernhardt" userId="f2333933-0b12-4d6e-972f-f87625423892" providerId="ADAL" clId="{2C628E33-589C-449E-BBA5-ED05E3E5CC01}" dt="2026-04-21T09:45:37.695" v="1107" actId="1076"/>
           <ac:picMkLst>
@@ -1241,24 +835,31 @@
             <ac:picMk id="6" creationId="{637390E1-DB75-C8EB-07DB-CC77E923857D}"/>
           </ac:picMkLst>
         </pc:picChg>
-        <pc:picChg chg="add del">
-          <ac:chgData name="Peter Bernhardt" userId="f2333933-0b12-4d6e-972f-f87625423892" providerId="ADAL" clId="{2C628E33-589C-449E-BBA5-ED05E3E5CC01}" dt="2026-04-21T09:44:56.978" v="1100" actId="478"/>
-          <ac:picMkLst>
-            <pc:docMk/>
-            <pc:sldMk cId="3793914736" sldId="333"/>
-            <ac:picMk id="2050" creationId="{EC144EDB-D834-1ACA-7EA3-181906E776AA}"/>
-          </ac:picMkLst>
-        </pc:picChg>
       </pc:sldChg>
     </pc:docChg>
   </pc:docChgLst>
   <pc:docChgLst>
     <pc:chgData name="Peter Bernhardt" userId="f2333933-0b12-4d6e-972f-f87625423892" providerId="ADAL" clId="{34DA1458-4058-4912-885C-C6A06A12728D}"/>
     <pc:docChg chg="undo custSel modSld">
-      <pc:chgData name="Peter Bernhardt" userId="f2333933-0b12-4d6e-972f-f87625423892" providerId="ADAL" clId="{34DA1458-4058-4912-885C-C6A06A12728D}" dt="2026-04-16T15:10:15.066" v="107" actId="20577"/>
+      <pc:chgData name="Peter Bernhardt" userId="f2333933-0b12-4d6e-972f-f87625423892" providerId="ADAL" clId="{34DA1458-4058-4912-885C-C6A06A12728D}" dt="2026-04-23T14:17:44.871" v="157" actId="20577"/>
       <pc:docMkLst>
         <pc:docMk/>
       </pc:docMkLst>
+      <pc:sldChg chg="modSp mod">
+        <pc:chgData name="Peter Bernhardt" userId="f2333933-0b12-4d6e-972f-f87625423892" providerId="ADAL" clId="{34DA1458-4058-4912-885C-C6A06A12728D}" dt="2026-04-23T14:17:44.871" v="157" actId="20577"/>
+        <pc:sldMkLst>
+          <pc:docMk/>
+          <pc:sldMk cId="0" sldId="312"/>
+        </pc:sldMkLst>
+        <pc:spChg chg="mod">
+          <ac:chgData name="Peter Bernhardt" userId="f2333933-0b12-4d6e-972f-f87625423892" providerId="ADAL" clId="{34DA1458-4058-4912-885C-C6A06A12728D}" dt="2026-04-23T14:17:44.871" v="157" actId="20577"/>
+          <ac:spMkLst>
+            <pc:docMk/>
+            <pc:sldMk cId="0" sldId="312"/>
+            <ac:spMk id="5" creationId="{A12D37CE-10DD-D13D-F193-322C5EFDC0E5}"/>
+          </ac:spMkLst>
+        </pc:spChg>
+      </pc:sldChg>
     </pc:docChg>
   </pc:docChgLst>
 </pc:chgInfo>
@@ -1966,7 +1567,7 @@
           <a:p>
             <a:fld id="{241EB5C9-1307-BA42-ABA2-0BC069CD8E7F}" type="datetimeFigureOut">
               <a:rPr lang="en-US" smtClean="0"/>
-              <a:t>4/21/2026</a:t>
+              <a:t>4/23/2026</a:t>
             </a:fld>
             <a:endParaRPr lang="en-US"/>
           </a:p>
@@ -2174,7 +1775,7 @@
           <a:p>
             <a:fld id="{241EB5C9-1307-BA42-ABA2-0BC069CD8E7F}" type="datetimeFigureOut">
               <a:rPr lang="en-US" smtClean="0"/>
-              <a:t>4/21/2026</a:t>
+              <a:t>4/23/2026</a:t>
             </a:fld>
             <a:endParaRPr lang="en-US"/>
           </a:p>
@@ -2430,7 +2031,7 @@
           <a:p>
             <a:fld id="{241EB5C9-1307-BA42-ABA2-0BC069CD8E7F}" type="datetimeFigureOut">
               <a:rPr lang="en-US" smtClean="0"/>
-              <a:t>4/21/2026</a:t>
+              <a:t>4/23/2026</a:t>
             </a:fld>
             <a:endParaRPr lang="en-US"/>
           </a:p>
@@ -2618,7 +2219,7 @@
           <a:p>
             <a:fld id="{241EB5C9-1307-BA42-ABA2-0BC069CD8E7F}" type="datetimeFigureOut">
               <a:rPr lang="en-US" smtClean="0"/>
-              <a:t>4/21/2026</a:t>
+              <a:t>4/23/2026</a:t>
             </a:fld>
             <a:endParaRPr lang="en-US"/>
           </a:p>
@@ -2975,7 +2576,7 @@
           <a:p>
             <a:fld id="{241EB5C9-1307-BA42-ABA2-0BC069CD8E7F}" type="datetimeFigureOut">
               <a:rPr lang="en-US" smtClean="0"/>
-              <a:t>4/21/2026</a:t>
+              <a:t>4/23/2026</a:t>
             </a:fld>
             <a:endParaRPr lang="en-US"/>
           </a:p>
@@ -3250,7 +2851,7 @@
           <a:p>
             <a:fld id="{241EB5C9-1307-BA42-ABA2-0BC069CD8E7F}" type="datetimeFigureOut">
               <a:rPr lang="en-US" smtClean="0"/>
-              <a:t>4/21/2026</a:t>
+              <a:t>4/23/2026</a:t>
             </a:fld>
             <a:endParaRPr lang="en-US"/>
           </a:p>
@@ -3629,7 +3230,7 @@
           <a:p>
             <a:fld id="{241EB5C9-1307-BA42-ABA2-0BC069CD8E7F}" type="datetimeFigureOut">
               <a:rPr lang="en-US" smtClean="0"/>
-              <a:t>4/21/2026</a:t>
+              <a:t>4/23/2026</a:t>
             </a:fld>
             <a:endParaRPr lang="en-US"/>
           </a:p>
@@ -3747,7 +3348,7 @@
           <a:p>
             <a:fld id="{241EB5C9-1307-BA42-ABA2-0BC069CD8E7F}" type="datetimeFigureOut">
               <a:rPr lang="en-US" smtClean="0"/>
-              <a:t>4/21/2026</a:t>
+              <a:t>4/23/2026</a:t>
             </a:fld>
             <a:endParaRPr lang="en-US"/>
           </a:p>
@@ -3918,7 +3519,7 @@
           <a:p>
             <a:fld id="{241EB5C9-1307-BA42-ABA2-0BC069CD8E7F}" type="datetimeFigureOut">
               <a:rPr lang="en-US" smtClean="0"/>
-              <a:t>4/21/2026</a:t>
+              <a:t>4/23/2026</a:t>
             </a:fld>
             <a:endParaRPr lang="en-US"/>
           </a:p>
@@ -4286,7 +3887,7 @@
           <a:p>
             <a:fld id="{241EB5C9-1307-BA42-ABA2-0BC069CD8E7F}" type="datetimeFigureOut">
               <a:rPr lang="en-US" smtClean="0"/>
-              <a:t>4/21/2026</a:t>
+              <a:t>4/23/2026</a:t>
             </a:fld>
             <a:endParaRPr lang="en-US"/>
           </a:p>
@@ -4663,7 +4264,7 @@
           <a:p>
             <a:fld id="{241EB5C9-1307-BA42-ABA2-0BC069CD8E7F}" type="datetimeFigureOut">
               <a:rPr lang="en-US" smtClean="0"/>
-              <a:t>4/21/2026</a:t>
+              <a:t>4/23/2026</a:t>
             </a:fld>
             <a:endParaRPr lang="en-US"/>
           </a:p>
@@ -4964,7 +4565,7 @@
           <a:p>
             <a:fld id="{241EB5C9-1307-BA42-ABA2-0BC069CD8E7F}" type="datetimeFigureOut">
               <a:rPr lang="en-US" smtClean="0"/>
-              <a:t>4/21/2026</a:t>
+              <a:t>4/23/2026</a:t>
             </a:fld>
             <a:endParaRPr lang="en-US"/>
           </a:p>
@@ -7868,7 +7469,7 @@
         <p:spPr>
           <a:xfrm>
             <a:off x="256310" y="1335725"/>
-            <a:ext cx="6477000" cy="3046988"/>
+            <a:ext cx="6477000" cy="2862322"/>
           </a:xfrm>
           <a:prstGeom prst="rect">
             <a:avLst/>
@@ -8608,6 +8209,16 @@
               </a:rPr>
               <a:t>BuergerDaten</a:t>
             </a:r>
+            <a:r>
+              <a:rPr lang="de-DE" sz="1200" b="0" dirty="0">
+                <a:solidFill>
+                  <a:srgbClr val="001080"/>
+                </a:solidFill>
+                <a:effectLst/>
+                <a:latin typeface="Consolas" panose="020B0609020204030204" pitchFamily="49" charset="0"/>
+              </a:rPr>
+              <a:t>(</a:t>
+            </a:r>
             <a:endParaRPr lang="de-DE" sz="1200" b="0" dirty="0">
               <a:solidFill>
                 <a:srgbClr val="3B3B3B"/>
@@ -8628,13 +8239,58 @@
                 <a:effectLst/>
                 <a:latin typeface="Consolas" panose="020B0609020204030204" pitchFamily="49" charset="0"/>
               </a:rPr>
-              <a:t>        {</a:t>
-            </a:r>
-          </a:p>
-          <a:p>
-            <a:pPr>
-              <a:buNone/>
-            </a:pPr>
+              <a:t>            </a:t>
+            </a:r>
+            <a:r>
+              <a:rPr lang="de-DE" sz="1200" b="0" dirty="0" err="1">
+                <a:solidFill>
+                  <a:srgbClr val="001080"/>
+                </a:solidFill>
+                <a:effectLst/>
+                <a:latin typeface="Consolas" panose="020B0609020204030204" pitchFamily="49" charset="0"/>
+              </a:rPr>
+              <a:t>meldeTask</a:t>
+            </a:r>
+            <a:r>
+              <a:rPr lang="de-DE" sz="1200" b="0" dirty="0" err="1">
+                <a:solidFill>
+                  <a:srgbClr val="000000"/>
+                </a:solidFill>
+                <a:effectLst/>
+                <a:latin typeface="Consolas" panose="020B0609020204030204" pitchFamily="49" charset="0"/>
+              </a:rPr>
+              <a:t>.</a:t>
+            </a:r>
+            <a:r>
+              <a:rPr lang="de-DE" sz="1200" b="0" dirty="0" err="1">
+                <a:solidFill>
+                  <a:srgbClr val="001080"/>
+                </a:solidFill>
+                <a:effectLst/>
+                <a:latin typeface="Consolas" panose="020B0609020204030204" pitchFamily="49" charset="0"/>
+              </a:rPr>
+              <a:t>Result</a:t>
+            </a:r>
+            <a:r>
+              <a:rPr lang="de-DE" sz="1200" b="0" dirty="0" err="1">
+                <a:solidFill>
+                  <a:srgbClr val="000000"/>
+                </a:solidFill>
+                <a:effectLst/>
+                <a:latin typeface="Consolas" panose="020B0609020204030204" pitchFamily="49" charset="0"/>
+              </a:rPr>
+              <a:t>.</a:t>
+            </a:r>
+            <a:r>
+              <a:rPr lang="de-DE" sz="1200" b="0" dirty="0" err="1">
+                <a:solidFill>
+                  <a:srgbClr val="001080"/>
+                </a:solidFill>
+                <a:effectLst/>
+                <a:latin typeface="Consolas" panose="020B0609020204030204" pitchFamily="49" charset="0"/>
+              </a:rPr>
+              <a:t>Name</a:t>
+            </a:r>
             <a:r>
               <a:rPr lang="de-DE" sz="1200" b="0" dirty="0">
                 <a:solidFill>
@@ -8643,212 +8299,16 @@
                 <a:effectLst/>
                 <a:latin typeface="Consolas" panose="020B0609020204030204" pitchFamily="49" charset="0"/>
               </a:rPr>
-              <a:t>            </a:t>
-            </a:r>
-            <a:r>
-              <a:rPr lang="de-DE" sz="1200" b="0" dirty="0">
-                <a:solidFill>
-                  <a:srgbClr val="001080"/>
-                </a:solidFill>
-                <a:effectLst/>
-                <a:latin typeface="Consolas" panose="020B0609020204030204" pitchFamily="49" charset="0"/>
-              </a:rPr>
-              <a:t>Name</a:t>
-            </a:r>
-            <a:r>
-              <a:rPr lang="de-DE" sz="1200" b="0" dirty="0">
-                <a:solidFill>
-                  <a:srgbClr val="3B3B3B"/>
-                </a:solidFill>
-                <a:effectLst/>
-                <a:latin typeface="Consolas" panose="020B0609020204030204" pitchFamily="49" charset="0"/>
-              </a:rPr>
-              <a:t> </a:t>
-            </a:r>
-            <a:r>
-              <a:rPr lang="de-DE" sz="1200" b="0" dirty="0">
-                <a:solidFill>
-                  <a:srgbClr val="000000"/>
-                </a:solidFill>
-                <a:effectLst/>
-                <a:latin typeface="Consolas" panose="020B0609020204030204" pitchFamily="49" charset="0"/>
-              </a:rPr>
-              <a:t>=</a:t>
-            </a:r>
-            <a:r>
-              <a:rPr lang="de-DE" sz="1200" b="0" dirty="0">
-                <a:solidFill>
-                  <a:srgbClr val="3B3B3B"/>
-                </a:solidFill>
-                <a:effectLst/>
-                <a:latin typeface="Consolas" panose="020B0609020204030204" pitchFamily="49" charset="0"/>
-              </a:rPr>
-              <a:t> </a:t>
-            </a:r>
-            <a:r>
-              <a:rPr lang="de-DE" sz="1200" b="0" dirty="0" err="1">
-                <a:solidFill>
-                  <a:srgbClr val="001080"/>
-                </a:solidFill>
-                <a:effectLst/>
-                <a:latin typeface="Consolas" panose="020B0609020204030204" pitchFamily="49" charset="0"/>
-              </a:rPr>
-              <a:t>meldeTask</a:t>
-            </a:r>
-            <a:r>
-              <a:rPr lang="de-DE" sz="1200" b="0" dirty="0" err="1">
-                <a:solidFill>
-                  <a:srgbClr val="000000"/>
-                </a:solidFill>
-                <a:effectLst/>
-                <a:latin typeface="Consolas" panose="020B0609020204030204" pitchFamily="49" charset="0"/>
-              </a:rPr>
-              <a:t>.</a:t>
-            </a:r>
-            <a:r>
-              <a:rPr lang="de-DE" sz="1200" b="0" dirty="0" err="1">
-                <a:solidFill>
-                  <a:srgbClr val="001080"/>
-                </a:solidFill>
-                <a:effectLst/>
-                <a:latin typeface="Consolas" panose="020B0609020204030204" pitchFamily="49" charset="0"/>
-              </a:rPr>
-              <a:t>Result</a:t>
-            </a:r>
-            <a:r>
-              <a:rPr lang="de-DE" sz="1200" b="0" dirty="0" err="1">
-                <a:solidFill>
-                  <a:srgbClr val="000000"/>
-                </a:solidFill>
-                <a:effectLst/>
-                <a:latin typeface="Consolas" panose="020B0609020204030204" pitchFamily="49" charset="0"/>
-              </a:rPr>
-              <a:t>.</a:t>
-            </a:r>
-            <a:r>
-              <a:rPr lang="de-DE" sz="1200" b="0" dirty="0" err="1">
-                <a:solidFill>
-                  <a:srgbClr val="001080"/>
-                </a:solidFill>
-                <a:effectLst/>
-                <a:latin typeface="Consolas" panose="020B0609020204030204" pitchFamily="49" charset="0"/>
-              </a:rPr>
-              <a:t>Name</a:t>
-            </a:r>
-            <a:r>
-              <a:rPr lang="de-DE" sz="1200" b="0" dirty="0">
-                <a:solidFill>
-                  <a:srgbClr val="3B3B3B"/>
-                </a:solidFill>
-                <a:effectLst/>
-                <a:latin typeface="Consolas" panose="020B0609020204030204" pitchFamily="49" charset="0"/>
-              </a:rPr>
-              <a:t>,</a:t>
-            </a:r>
-          </a:p>
-          <a:p>
-            <a:pPr>
-              <a:buNone/>
-            </a:pPr>
-            <a:r>
-              <a:rPr lang="de-DE" sz="1200" b="0" dirty="0">
-                <a:solidFill>
-                  <a:srgbClr val="3B3B3B"/>
-                </a:solidFill>
-                <a:effectLst/>
-                <a:latin typeface="Consolas" panose="020B0609020204030204" pitchFamily="49" charset="0"/>
-              </a:rPr>
-              <a:t>            </a:t>
-            </a:r>
-            <a:r>
-              <a:rPr lang="de-DE" sz="1200" b="0" dirty="0" err="1">
-                <a:solidFill>
-                  <a:srgbClr val="001080"/>
-                </a:solidFill>
-                <a:effectLst/>
-                <a:latin typeface="Consolas" panose="020B0609020204030204" pitchFamily="49" charset="0"/>
-              </a:rPr>
-              <a:t>SteuerKlasse</a:t>
-            </a:r>
-            <a:r>
-              <a:rPr lang="de-DE" sz="1200" b="0" dirty="0">
-                <a:solidFill>
-                  <a:srgbClr val="3B3B3B"/>
-                </a:solidFill>
-                <a:effectLst/>
-                <a:latin typeface="Consolas" panose="020B0609020204030204" pitchFamily="49" charset="0"/>
-              </a:rPr>
-              <a:t> </a:t>
-            </a:r>
-            <a:r>
-              <a:rPr lang="de-DE" sz="1200" b="0" dirty="0">
-                <a:solidFill>
-                  <a:srgbClr val="000000"/>
-                </a:solidFill>
-                <a:effectLst/>
-                <a:latin typeface="Consolas" panose="020B0609020204030204" pitchFamily="49" charset="0"/>
-              </a:rPr>
-              <a:t>=</a:t>
-            </a:r>
-            <a:r>
-              <a:rPr lang="de-DE" sz="1200" b="0" dirty="0">
-                <a:solidFill>
-                  <a:srgbClr val="3B3B3B"/>
-                </a:solidFill>
-                <a:effectLst/>
-                <a:latin typeface="Consolas" panose="020B0609020204030204" pitchFamily="49" charset="0"/>
-              </a:rPr>
-              <a:t> </a:t>
-            </a:r>
-            <a:r>
-              <a:rPr lang="de-DE" sz="1200" b="0" dirty="0" err="1">
-                <a:solidFill>
-                  <a:srgbClr val="001080"/>
-                </a:solidFill>
-                <a:effectLst/>
-                <a:latin typeface="Consolas" panose="020B0609020204030204" pitchFamily="49" charset="0"/>
-              </a:rPr>
-              <a:t>steuerTask</a:t>
-            </a:r>
-            <a:r>
-              <a:rPr lang="de-DE" sz="1200" b="0" dirty="0" err="1">
-                <a:solidFill>
-                  <a:srgbClr val="000000"/>
-                </a:solidFill>
-                <a:effectLst/>
-                <a:latin typeface="Consolas" panose="020B0609020204030204" pitchFamily="49" charset="0"/>
-              </a:rPr>
-              <a:t>.</a:t>
-            </a:r>
-            <a:r>
-              <a:rPr lang="de-DE" sz="1200" b="0" dirty="0" err="1">
-                <a:solidFill>
-                  <a:srgbClr val="001080"/>
-                </a:solidFill>
-                <a:effectLst/>
-                <a:latin typeface="Consolas" panose="020B0609020204030204" pitchFamily="49" charset="0"/>
-              </a:rPr>
-              <a:t>Result</a:t>
-            </a:r>
-            <a:r>
-              <a:rPr lang="de-DE" sz="1200" b="0" dirty="0" err="1">
-                <a:solidFill>
-                  <a:srgbClr val="000000"/>
-                </a:solidFill>
-                <a:effectLst/>
-                <a:latin typeface="Consolas" panose="020B0609020204030204" pitchFamily="49" charset="0"/>
-              </a:rPr>
-              <a:t>.</a:t>
-            </a:r>
-            <a:r>
-              <a:rPr lang="de-DE" sz="1200" b="0" dirty="0" err="1">
-                <a:solidFill>
-                  <a:srgbClr val="001080"/>
-                </a:solidFill>
-                <a:effectLst/>
-                <a:latin typeface="Consolas" panose="020B0609020204030204" pitchFamily="49" charset="0"/>
-              </a:rPr>
-              <a:t>Klasse</a:t>
+              <a:t>,   </a:t>
+            </a:r>
+            <a:r>
+              <a:rPr lang="de-DE" sz="1200" dirty="0">
+                <a:solidFill>
+                  <a:srgbClr val="008000"/>
+                </a:solidFill>
+                <a:latin typeface="Consolas" panose="020B0609020204030204" pitchFamily="49" charset="0"/>
+              </a:rPr>
+              <a:t>// Name</a:t>
             </a:r>
             <a:endParaRPr lang="de-DE" sz="1200" b="0" dirty="0">
               <a:solidFill>
@@ -8870,7 +8330,98 @@
                 <a:effectLst/>
                 <a:latin typeface="Consolas" panose="020B0609020204030204" pitchFamily="49" charset="0"/>
               </a:rPr>
-              <a:t>        };</a:t>
+              <a:t>            </a:t>
+            </a:r>
+            <a:r>
+              <a:rPr lang="de-DE" sz="1200" b="0" dirty="0" err="1">
+                <a:solidFill>
+                  <a:srgbClr val="001080"/>
+                </a:solidFill>
+                <a:effectLst/>
+                <a:latin typeface="Consolas" panose="020B0609020204030204" pitchFamily="49" charset="0"/>
+              </a:rPr>
+              <a:t>steuerTask</a:t>
+            </a:r>
+            <a:r>
+              <a:rPr lang="de-DE" sz="1200" b="0" dirty="0" err="1">
+                <a:solidFill>
+                  <a:srgbClr val="000000"/>
+                </a:solidFill>
+                <a:effectLst/>
+                <a:latin typeface="Consolas" panose="020B0609020204030204" pitchFamily="49" charset="0"/>
+              </a:rPr>
+              <a:t>.</a:t>
+            </a:r>
+            <a:r>
+              <a:rPr lang="de-DE" sz="1200" b="0" dirty="0" err="1">
+                <a:solidFill>
+                  <a:srgbClr val="001080"/>
+                </a:solidFill>
+                <a:effectLst/>
+                <a:latin typeface="Consolas" panose="020B0609020204030204" pitchFamily="49" charset="0"/>
+              </a:rPr>
+              <a:t>Result</a:t>
+            </a:r>
+            <a:r>
+              <a:rPr lang="de-DE" sz="1200" b="0" dirty="0" err="1">
+                <a:solidFill>
+                  <a:srgbClr val="000000"/>
+                </a:solidFill>
+                <a:effectLst/>
+                <a:latin typeface="Consolas" panose="020B0609020204030204" pitchFamily="49" charset="0"/>
+              </a:rPr>
+              <a:t>.</a:t>
+            </a:r>
+            <a:r>
+              <a:rPr lang="de-DE" sz="1200" b="0" dirty="0" err="1">
+                <a:solidFill>
+                  <a:srgbClr val="001080"/>
+                </a:solidFill>
+                <a:effectLst/>
+                <a:latin typeface="Consolas" panose="020B0609020204030204" pitchFamily="49" charset="0"/>
+              </a:rPr>
+              <a:t>Klasse</a:t>
+            </a:r>
+            <a:r>
+              <a:rPr lang="de-DE" sz="1200" b="0" dirty="0">
+                <a:solidFill>
+                  <a:srgbClr val="001080"/>
+                </a:solidFill>
+                <a:effectLst/>
+                <a:latin typeface="Consolas" panose="020B0609020204030204" pitchFamily="49" charset="0"/>
+              </a:rPr>
+              <a:t> </a:t>
+            </a:r>
+            <a:r>
+              <a:rPr lang="de-DE" sz="1200" dirty="0">
+                <a:solidFill>
+                  <a:srgbClr val="008000"/>
+                </a:solidFill>
+                <a:latin typeface="Consolas" panose="020B0609020204030204" pitchFamily="49" charset="0"/>
+              </a:rPr>
+              <a:t>// Steuerklasse</a:t>
+            </a:r>
+            <a:endParaRPr lang="de-DE" sz="1200" b="0" dirty="0">
+              <a:solidFill>
+                <a:srgbClr val="3B3B3B"/>
+              </a:solidFill>
+              <a:effectLst/>
+              <a:latin typeface="Consolas" panose="020B0609020204030204" pitchFamily="49" charset="0"/>
+            </a:endParaRPr>
+          </a:p>
+          <a:p>
+            <a:pPr>
+              <a:buNone/>
+            </a:pPr>
+            <a:r>
+              <a:rPr lang="de-DE" sz="1200" b="0" dirty="0">
+                <a:solidFill>
+                  <a:srgbClr val="3B3B3B"/>
+                </a:solidFill>
+                <a:effectLst/>
+                <a:latin typeface="Consolas" panose="020B0609020204030204" pitchFamily="49" charset="0"/>
+              </a:rPr>
+              <a:t>        );</a:t>
             </a:r>
           </a:p>
           <a:p>
